--- a/PPT-version/AI-Ops/AI-Ops-讲义.pptx
+++ b/PPT-version/AI-Ops/AI-Ops-讲义.pptx
@@ -31852,7 +31852,7 @@
                 </a:solidFill>
                 <a:latin typeface="Calibri"/>
               </a:rPr>
-              <a:t>给客户答"我们有 Datadog 还要买吗"：APM（Application Performance Monitoring） 系管成本延迟，质量评估必须配专用系</a:t>
+              <a:t>给客户答"我们有 Datadog 还要买吗"：APM（Application Performance Monitoring） 系管成本延迟，深度质量评估仍需专用系</a:t>
             </a:r>
           </a:p>
         </p:txBody>
@@ -32098,7 +32098,7 @@
                 </a:solidFill>
                 <a:latin typeface="Cambria"/>
               </a:rPr>
-              <a:t>六平台锚定（2026-07 口径）</a:t>
+              <a:t>六平台锚定（2026-10 口径）</a:t>
             </a:r>
           </a:p>
         </p:txBody>
@@ -33152,7 +33152,7 @@
                 </a:solidFill>
                 <a:latin typeface="Calibri"/>
               </a:rPr>
-              <a:t>管成本延迟够用，质量评估弱</a:t>
+              <a:t>成本延迟够用；有评审队列，评估尚浅</a:t>
             </a:r>
           </a:p>
         </p:txBody>
@@ -34403,7 +34403,7 @@
                 </a:solidFill>
                 <a:latin typeface="Calibri"/>
               </a:rPr>
-              <a:t>补专用系管质量：评估分、漂移、评审队列</a:t>
+              <a:t>补专用系管质量：深度评估、漂移分析</a:t>
             </a:r>
           </a:p>
           <a:p>
@@ -37182,7 +37182,7 @@
                 </a:solidFill>
                 <a:latin typeface="Calibri"/>
               </a:rPr>
-              <a:t>不冲突：Datadog 继续管成本、延迟、基础告警；补一层专用系管质量评估、漂移、评审队列，两层 trace id 打通。预算敏感可用开源自托管（Langfuse/Phoenix）承接专用层。</a:t>
+              <a:t>不冲突：Datadog 继续管成本、延迟、基础告警；补一层专用系管深度质量评估与漂移分析，两层 trace id 打通。预算敏感可用开源自托管（Langfuse/Phoenix）承接专用层。</a:t>
             </a:r>
           </a:p>
         </p:txBody>
@@ -52885,7 +52885,7 @@
                 </a:solidFill>
                 <a:latin typeface="Calibri"/>
               </a:rPr>
-              <a:t>Datadog 管「挂没挂、慢不慢」很好，但看不到「答得对不对」——200 OK 里可能装着胡说。质量轴需要评估型观测，两者是互补不是替换，第 7 章有分工表。</a:t>
+              <a:t>Datadog 管「挂没挂、慢不慢」很好，但「答得对不对」只有基础评估——200 OK 里可能装着胡说。质量轴需要评估型观测，两者是互补不是替换，第 7 章有分工表。</a:t>
             </a:r>
           </a:p>
         </p:txBody>
